--- a/CalendarioAgo26/presentaciones/9_Archivos.pptx
+++ b/CalendarioAgo26/presentaciones/9_Archivos.pptx
@@ -149,6 +149,43 @@
 </p:presentation>
 </file>
 
+<file path=ppt/revisionInfo.xml><?xml version="1.0" encoding="utf-8"?>
+<p1510:revInfo xmlns:a="http://schemas.openxmlformats.org/drawingml/2006/main" xmlns:r="http://schemas.openxmlformats.org/officeDocument/2006/relationships" xmlns:p1510="http://schemas.microsoft.com/office/powerpoint/2015/10/main">
+  <p1510:revLst>
+    <p1510:client id="{DF14A236-2447-43CC-95F3-8BF9BCEA96B9}" v="1" dt="2026-08-11T16:25:28.479"/>
+  </p1510:revLst>
+</p1510:revInfo>
+</file>
+
+<file path=ppt/changesInfos/changesInfo1.xml><?xml version="1.0" encoding="utf-8"?>
+<pc:chgInfo xmlns:a="http://schemas.openxmlformats.org/drawingml/2006/main" xmlns:r="http://schemas.openxmlformats.org/officeDocument/2006/relationships" xmlns:ac="http://schemas.microsoft.com/office/drawing/2013/main/command" xmlns:pc="http://schemas.microsoft.com/office/powerpoint/2013/main/command">
+  <pc:docChgLst>
+    <pc:chgData name="Lizethe Pérez Fuertes" userId="4ae9ef87-2a7d-42f8-8dfa-0a501a9e2ff4" providerId="ADAL" clId="{FDDD45CB-1330-4033-A842-3D2746AFF7C7}"/>
+    <pc:docChg chg="modSld">
+      <pc:chgData name="Lizethe Pérez Fuertes" userId="4ae9ef87-2a7d-42f8-8dfa-0a501a9e2ff4" providerId="ADAL" clId="{FDDD45CB-1330-4033-A842-3D2746AFF7C7}" dt="2026-08-11T16:25:28.479" v="0"/>
+      <pc:docMkLst>
+        <pc:docMk/>
+      </pc:docMkLst>
+      <pc:sldChg chg="modSp">
+        <pc:chgData name="Lizethe Pérez Fuertes" userId="4ae9ef87-2a7d-42f8-8dfa-0a501a9e2ff4" providerId="ADAL" clId="{FDDD45CB-1330-4033-A842-3D2746AFF7C7}" dt="2026-08-11T16:25:28.479" v="0"/>
+        <pc:sldMkLst>
+          <pc:docMk/>
+          <pc:sldMk cId="1182132109" sldId="283"/>
+        </pc:sldMkLst>
+        <pc:spChg chg="mod">
+          <ac:chgData name="Lizethe Pérez Fuertes" userId="4ae9ef87-2a7d-42f8-8dfa-0a501a9e2ff4" providerId="ADAL" clId="{FDDD45CB-1330-4033-A842-3D2746AFF7C7}" dt="2026-08-11T16:25:28.479" v="0"/>
+          <ac:spMkLst>
+            <pc:docMk/>
+            <pc:sldMk cId="1182132109" sldId="283"/>
+            <ac:spMk id="5" creationId="{21CCDEE3-92F2-40D7-B31B-F3F58EC0FC0D}"/>
+          </ac:spMkLst>
+        </pc:spChg>
+      </pc:sldChg>
+    </pc:docChg>
+  </pc:docChgLst>
+</pc:chgInfo>
+</file>
+
 <file path=ppt/notesMasters/notesMaster1.xml><?xml version="1.0" encoding="utf-8"?>
 <p:notesMaster xmlns:a="http://schemas.openxmlformats.org/drawingml/2006/main" xmlns:r="http://schemas.openxmlformats.org/officeDocument/2006/relationships" xmlns:p="http://schemas.openxmlformats.org/presentationml/2006/main">
   <p:cSld>
@@ -231,7 +268,7 @@
           <a:p>
             <a:fld id="{59C7E2AA-6A4C-4042-9554-ED2A913B287A}" type="datetimeFigureOut">
               <a:rPr lang="es-MX" smtClean="0"/>
-              <a:t>21/02/2024</a:t>
+              <a:t>11/08/2026</a:t>
             </a:fld>
             <a:endParaRPr lang="es-MX" dirty="0"/>
           </a:p>
@@ -390,7 +427,7 @@
           <a:p>
             <a:fld id="{696058A4-74A4-4E49-9DDB-7D0AF71A622B}" type="slidenum">
               <a:rPr lang="es-MX" smtClean="0"/>
-              <a:t>‹#›</a:t>
+              <a:t>‹Nº›</a:t>
             </a:fld>
             <a:endParaRPr lang="es-MX" dirty="0"/>
           </a:p>
@@ -3352,7 +3389,7 @@
           <a:p>
             <a:fld id="{BAE3B62E-9D6B-4C41-BFE5-D19C53A0513B}" type="datetimeFigureOut">
               <a:rPr lang="es-MX" smtClean="0"/>
-              <a:t>21/02/2024</a:t>
+              <a:t>11/08/2026</a:t>
             </a:fld>
             <a:endParaRPr lang="es-MX" dirty="0"/>
           </a:p>
@@ -3394,7 +3431,7 @@
           <a:p>
             <a:fld id="{92823904-E0C3-4D45-A85E-A4B4FAD16498}" type="slidenum">
               <a:rPr lang="es-MX" smtClean="0"/>
-              <a:t>‹#›</a:t>
+              <a:t>‹Nº›</a:t>
             </a:fld>
             <a:endParaRPr lang="es-MX" dirty="0"/>
           </a:p>
@@ -3522,7 +3559,7 @@
           <a:p>
             <a:fld id="{BAE3B62E-9D6B-4C41-BFE5-D19C53A0513B}" type="datetimeFigureOut">
               <a:rPr lang="es-MX" smtClean="0"/>
-              <a:t>21/02/2024</a:t>
+              <a:t>11/08/2026</a:t>
             </a:fld>
             <a:endParaRPr lang="es-MX" dirty="0"/>
           </a:p>
@@ -3564,7 +3601,7 @@
           <a:p>
             <a:fld id="{92823904-E0C3-4D45-A85E-A4B4FAD16498}" type="slidenum">
               <a:rPr lang="es-MX" smtClean="0"/>
-              <a:t>‹#›</a:t>
+              <a:t>‹Nº›</a:t>
             </a:fld>
             <a:endParaRPr lang="es-MX" dirty="0"/>
           </a:p>
@@ -3702,7 +3739,7 @@
           <a:p>
             <a:fld id="{BAE3B62E-9D6B-4C41-BFE5-D19C53A0513B}" type="datetimeFigureOut">
               <a:rPr lang="es-MX" smtClean="0"/>
-              <a:t>21/02/2024</a:t>
+              <a:t>11/08/2026</a:t>
             </a:fld>
             <a:endParaRPr lang="es-MX" dirty="0"/>
           </a:p>
@@ -3744,7 +3781,7 @@
           <a:p>
             <a:fld id="{92823904-E0C3-4D45-A85E-A4B4FAD16498}" type="slidenum">
               <a:rPr lang="es-MX" smtClean="0"/>
-              <a:t>‹#›</a:t>
+              <a:t>‹Nº›</a:t>
             </a:fld>
             <a:endParaRPr lang="es-MX" dirty="0"/>
           </a:p>
@@ -3855,7 +3892,7 @@
           <a:p>
             <a:fld id="{1D8BD707-D9CF-40AE-B4C6-C98DA3205C09}" type="datetimeFigureOut">
               <a:rPr lang="en-US" smtClean="0"/>
-              <a:t>2/21/2024</a:t>
+              <a:t>8/11/2026</a:t>
             </a:fld>
             <a:endParaRPr lang="en-US"/>
           </a:p>
@@ -3885,7 +3922,7 @@
                 <a:cs typeface="Calibri"/>
               </a:rPr>
               <a:pPr marL="25400"/>
-              <a:t>‹#›</a:t>
+              <a:t>‹Nº›</a:t>
             </a:fld>
             <a:endParaRPr lang="es-MX">
               <a:cs typeface="Calibri"/>
@@ -4015,7 +4052,7 @@
           <a:p>
             <a:fld id="{BAE3B62E-9D6B-4C41-BFE5-D19C53A0513B}" type="datetimeFigureOut">
               <a:rPr lang="es-MX" smtClean="0"/>
-              <a:t>21/02/2024</a:t>
+              <a:t>11/08/2026</a:t>
             </a:fld>
             <a:endParaRPr lang="es-MX" dirty="0"/>
           </a:p>
@@ -4057,7 +4094,7 @@
           <a:p>
             <a:fld id="{92823904-E0C3-4D45-A85E-A4B4FAD16498}" type="slidenum">
               <a:rPr lang="es-MX" smtClean="0"/>
-              <a:t>‹#›</a:t>
+              <a:t>‹Nº›</a:t>
             </a:fld>
             <a:endParaRPr lang="es-MX" dirty="0"/>
           </a:p>
@@ -4261,7 +4298,7 @@
           <a:p>
             <a:fld id="{BAE3B62E-9D6B-4C41-BFE5-D19C53A0513B}" type="datetimeFigureOut">
               <a:rPr lang="es-MX" smtClean="0"/>
-              <a:t>21/02/2024</a:t>
+              <a:t>11/08/2026</a:t>
             </a:fld>
             <a:endParaRPr lang="es-MX" dirty="0"/>
           </a:p>
@@ -4303,7 +4340,7 @@
           <a:p>
             <a:fld id="{92823904-E0C3-4D45-A85E-A4B4FAD16498}" type="slidenum">
               <a:rPr lang="es-MX" smtClean="0"/>
-              <a:t>‹#›</a:t>
+              <a:t>‹Nº›</a:t>
             </a:fld>
             <a:endParaRPr lang="es-MX" dirty="0"/>
           </a:p>
@@ -4549,7 +4586,7 @@
           <a:p>
             <a:fld id="{BAE3B62E-9D6B-4C41-BFE5-D19C53A0513B}" type="datetimeFigureOut">
               <a:rPr lang="es-MX" smtClean="0"/>
-              <a:t>21/02/2024</a:t>
+              <a:t>11/08/2026</a:t>
             </a:fld>
             <a:endParaRPr lang="es-MX" dirty="0"/>
           </a:p>
@@ -4591,7 +4628,7 @@
           <a:p>
             <a:fld id="{92823904-E0C3-4D45-A85E-A4B4FAD16498}" type="slidenum">
               <a:rPr lang="es-MX" smtClean="0"/>
-              <a:t>‹#›</a:t>
+              <a:t>‹Nº›</a:t>
             </a:fld>
             <a:endParaRPr lang="es-MX" dirty="0"/>
           </a:p>
@@ -4971,7 +5008,7 @@
           <a:p>
             <a:fld id="{BAE3B62E-9D6B-4C41-BFE5-D19C53A0513B}" type="datetimeFigureOut">
               <a:rPr lang="es-MX" smtClean="0"/>
-              <a:t>21/02/2024</a:t>
+              <a:t>11/08/2026</a:t>
             </a:fld>
             <a:endParaRPr lang="es-MX" dirty="0"/>
           </a:p>
@@ -5013,7 +5050,7 @@
           <a:p>
             <a:fld id="{92823904-E0C3-4D45-A85E-A4B4FAD16498}" type="slidenum">
               <a:rPr lang="es-MX" smtClean="0"/>
-              <a:t>‹#›</a:t>
+              <a:t>‹Nº›</a:t>
             </a:fld>
             <a:endParaRPr lang="es-MX" dirty="0"/>
           </a:p>
@@ -5089,7 +5126,7 @@
           <a:p>
             <a:fld id="{BAE3B62E-9D6B-4C41-BFE5-D19C53A0513B}" type="datetimeFigureOut">
               <a:rPr lang="es-MX" smtClean="0"/>
-              <a:t>21/02/2024</a:t>
+              <a:t>11/08/2026</a:t>
             </a:fld>
             <a:endParaRPr lang="es-MX" dirty="0"/>
           </a:p>
@@ -5131,7 +5168,7 @@
           <a:p>
             <a:fld id="{92823904-E0C3-4D45-A85E-A4B4FAD16498}" type="slidenum">
               <a:rPr lang="es-MX" smtClean="0"/>
-              <a:t>‹#›</a:t>
+              <a:t>‹Nº›</a:t>
             </a:fld>
             <a:endParaRPr lang="es-MX" dirty="0"/>
           </a:p>
@@ -5184,7 +5221,7 @@
           <a:p>
             <a:fld id="{BAE3B62E-9D6B-4C41-BFE5-D19C53A0513B}" type="datetimeFigureOut">
               <a:rPr lang="es-MX" smtClean="0"/>
-              <a:t>21/02/2024</a:t>
+              <a:t>11/08/2026</a:t>
             </a:fld>
             <a:endParaRPr lang="es-MX" dirty="0"/>
           </a:p>
@@ -5226,7 +5263,7 @@
           <a:p>
             <a:fld id="{92823904-E0C3-4D45-A85E-A4B4FAD16498}" type="slidenum">
               <a:rPr lang="es-MX" smtClean="0"/>
-              <a:t>‹#›</a:t>
+              <a:t>‹Nº›</a:t>
             </a:fld>
             <a:endParaRPr lang="es-MX" dirty="0"/>
           </a:p>
@@ -5461,7 +5498,7 @@
           <a:p>
             <a:fld id="{BAE3B62E-9D6B-4C41-BFE5-D19C53A0513B}" type="datetimeFigureOut">
               <a:rPr lang="es-MX" smtClean="0"/>
-              <a:t>21/02/2024</a:t>
+              <a:t>11/08/2026</a:t>
             </a:fld>
             <a:endParaRPr lang="es-MX" dirty="0"/>
           </a:p>
@@ -5503,7 +5540,7 @@
           <a:p>
             <a:fld id="{92823904-E0C3-4D45-A85E-A4B4FAD16498}" type="slidenum">
               <a:rPr lang="es-MX" smtClean="0"/>
-              <a:t>‹#›</a:t>
+              <a:t>‹Nº›</a:t>
             </a:fld>
             <a:endParaRPr lang="es-MX" dirty="0"/>
           </a:p>
@@ -5714,7 +5751,7 @@
           <a:p>
             <a:fld id="{BAE3B62E-9D6B-4C41-BFE5-D19C53A0513B}" type="datetimeFigureOut">
               <a:rPr lang="es-MX" smtClean="0"/>
-              <a:t>21/02/2024</a:t>
+              <a:t>11/08/2026</a:t>
             </a:fld>
             <a:endParaRPr lang="es-MX" dirty="0"/>
           </a:p>
@@ -5756,7 +5793,7 @@
           <a:p>
             <a:fld id="{92823904-E0C3-4D45-A85E-A4B4FAD16498}" type="slidenum">
               <a:rPr lang="es-MX" smtClean="0"/>
-              <a:t>‹#›</a:t>
+              <a:t>‹Nº›</a:t>
             </a:fld>
             <a:endParaRPr lang="es-MX" dirty="0"/>
           </a:p>
@@ -5927,7 +5964,7 @@
           <a:p>
             <a:fld id="{BAE3B62E-9D6B-4C41-BFE5-D19C53A0513B}" type="datetimeFigureOut">
               <a:rPr lang="es-MX" smtClean="0"/>
-              <a:t>21/02/2024</a:t>
+              <a:t>11/08/2026</a:t>
             </a:fld>
             <a:endParaRPr lang="es-MX" dirty="0"/>
           </a:p>
@@ -6005,7 +6042,7 @@
           <a:p>
             <a:fld id="{92823904-E0C3-4D45-A85E-A4B4FAD16498}" type="slidenum">
               <a:rPr lang="es-MX" smtClean="0"/>
-              <a:t>‹#›</a:t>
+              <a:t>‹Nº›</a:t>
             </a:fld>
             <a:endParaRPr lang="es-MX" dirty="0"/>
           </a:p>
@@ -6443,14 +6480,14 @@
               <a:defRPr/>
             </a:pPr>
             <a:r>
-              <a:rPr lang="es-MX" sz="3200" dirty="0">
+              <a:rPr lang="es-MX" sz="3200">
                 <a:solidFill>
                   <a:schemeClr val="bg2">
                     <a:lumMod val="50000"/>
                   </a:schemeClr>
                 </a:solidFill>
               </a:rPr>
-              <a:t>TC 3001 C </a:t>
+              <a:t>TI 3008 C</a:t>
             </a:r>
             <a:br>
               <a:rPr lang="es-MX" sz="3200" dirty="0">
